--- a/examples/E3/ejemplo-biblioya-e3-presentacion.pptx
+++ b/examples/E3/ejemplo-biblioya-e3-presentacion.pptx
@@ -1508,7 +1508,7 @@
                 <a:ea typeface="Calibri" pitchFamily="34" charset="-122"/>
                 <a:cs typeface="Calibri" pitchFamily="34" charset="-120"/>
               </a:rPr>
-              <a:t>20 de octubre de 2026</a:t>
+              <a:t>23 de octubre de 2026</a:t>
             </a:r>
             <a:endParaRPr lang="en-US" sz="1800" dirty="0"/>
           </a:p>
@@ -2992,8 +2992,8 @@
         </p:blipFill>
         <p:spPr>
           <a:xfrm>
-            <a:off x="5078802" y="1097280"/>
-            <a:ext cx="2034091" cy="5166360"/>
+            <a:off x="4891681" y="1097280"/>
+            <a:ext cx="2408333" cy="5166360"/>
           </a:xfrm>
           <a:prstGeom prst="rect">
             <a:avLst/>
